--- a/Week06/MoreHtml.pptx
+++ b/Week06/MoreHtml.pptx
@@ -5224,7 +5224,7 @@
           <a:p>
             <a:fld id="{5958763E-B898-436D-883D-03711491D54A}" type="datetimeFigureOut">
               <a:rPr lang="en-US" smtClean="0"/>
-              <a:t>9/4/2024</a:t>
+              <a:t>8/27/2026</a:t>
             </a:fld>
             <a:endParaRPr lang="en-US"/>
           </a:p>
@@ -7925,9 +7925,7 @@
             <a:r>
               <a:rPr lang="en-US" sz="2400" b="1" dirty="0">
                 <a:solidFill>
-                  <a:schemeClr val="bg1">
-                    <a:lumMod val="95000"/>
-                  </a:schemeClr>
+                  <a:schemeClr val="bg1"/>
                 </a:solidFill>
                 <a:hlinkClick r:id="rId3">
                   <a:extLst>
@@ -7937,13 +7935,11 @@
                   </a:extLst>
                 </a:hlinkClick>
               </a:rPr>
-              <a:t>https://jsfiddle.net/f9ranj5m/</a:t>
+              <a:t>https://hytop.onrender.com/e/html-span-example</a:t>
             </a:r>
             <a:endParaRPr lang="en-US" sz="2400" b="1" dirty="0">
               <a:solidFill>
-                <a:schemeClr val="bg1">
-                  <a:lumMod val="95000"/>
-                </a:schemeClr>
+                <a:schemeClr val="bg1"/>
               </a:solidFill>
             </a:endParaRPr>
           </a:p>
@@ -9079,12 +9075,12 @@
               </a:spcAft>
             </a:pPr>
             <a:r>
-              <a:rPr lang="en-US" sz="2800">
+              <a:rPr lang="en-US" sz="2800" dirty="0">
                 <a:latin typeface="Miriam Libre" panose="00000500000000000000" pitchFamily="2" charset="-79"/>
                 <a:cs typeface="Miriam Libre" panose="00000500000000000000" pitchFamily="2" charset="-79"/>
                 <a:hlinkClick r:id="rId3"/>
               </a:rPr>
-              <a:t>https://jsfiddle.net/w0o5uxkt/</a:t>
+              <a:t>https://hytop.onrender.com/e/html-div-example</a:t>
             </a:r>
             <a:endParaRPr lang="en-US" sz="2800" dirty="0">
               <a:gradFill>
